--- a/LabBook_20.pptx
+++ b/LabBook_20.pptx
@@ -162,7 +162,7 @@
 <file path=ppt/revisionInfo.xml><?xml version="1.0" encoding="utf-8"?>
 <p1510:revInfo xmlns:a="http://schemas.openxmlformats.org/drawingml/2006/main" xmlns:r="http://schemas.openxmlformats.org/officeDocument/2006/relationships" xmlns:p1510="http://schemas.microsoft.com/office/powerpoint/2015/10/main">
   <p1510:revLst>
-    <p1510:client id="{83A706B2-AA95-4CDC-834C-F4D908C80230}" v="95" dt="2025-02-09T23:48:29.268"/>
+    <p1510:client id="{749E4FFB-E431-0F4D-ED87-FC6C47517DFE}" v="14" dt="2026-05-03T14:40:37.138"/>
   </p1510:revLst>
 </p1510:revInfo>
 </file>
@@ -170,563 +170,24 @@
 <file path=ppt/changesInfos/changesInfo1.xml><?xml version="1.0" encoding="utf-8"?>
 <pc:chgInfo xmlns:a="http://schemas.openxmlformats.org/drawingml/2006/main" xmlns:r="http://schemas.openxmlformats.org/officeDocument/2006/relationships" xmlns:ac="http://schemas.microsoft.com/office/drawing/2013/main/command" xmlns:pc="http://schemas.microsoft.com/office/powerpoint/2013/main/command">
   <pc:docChgLst>
-    <pc:chgData name="Christian Camilo Cano Vasquez" userId="8c73a2a4-758b-4e34-81ed-39462e48bd92" providerId="ADAL" clId="{83A706B2-AA95-4CDC-834C-F4D908C80230}"/>
-    <pc:docChg chg="undo redo custSel addSld delSld modSld">
-      <pc:chgData name="Christian Camilo Cano Vasquez" userId="8c73a2a4-758b-4e34-81ed-39462e48bd92" providerId="ADAL" clId="{83A706B2-AA95-4CDC-834C-F4D908C80230}" dt="2025-02-10T11:46:25.185" v="655" actId="20577"/>
+    <pc:chgData name="Elias San Martin Diehl" userId="S::esanmar2@upv.edu.es::c38c0557-adde-461d-a1bd-22239621d8b6" providerId="AD" clId="Web-{749E4FFB-E431-0F4D-ED87-FC6C47517DFE}"/>
+    <pc:docChg chg="modSld">
+      <pc:chgData name="Elias San Martin Diehl" userId="S::esanmar2@upv.edu.es::c38c0557-adde-461d-a1bd-22239621d8b6" providerId="AD" clId="Web-{749E4FFB-E431-0F4D-ED87-FC6C47517DFE}" dt="2026-05-03T14:40:37.138" v="6" actId="20577"/>
       <pc:docMkLst>
         <pc:docMk/>
       </pc:docMkLst>
-      <pc:sldChg chg="modSp mod">
-        <pc:chgData name="Christian Camilo Cano Vasquez" userId="8c73a2a4-758b-4e34-81ed-39462e48bd92" providerId="ADAL" clId="{83A706B2-AA95-4CDC-834C-F4D908C80230}" dt="2025-02-09T23:21:47.550" v="170" actId="20577"/>
+      <pc:sldChg chg="modSp">
+        <pc:chgData name="Elias San Martin Diehl" userId="S::esanmar2@upv.edu.es::c38c0557-adde-461d-a1bd-22239621d8b6" providerId="AD" clId="Web-{749E4FFB-E431-0F4D-ED87-FC6C47517DFE}" dt="2026-05-03T14:40:37.138" v="6" actId="20577"/>
         <pc:sldMkLst>
           <pc:docMk/>
           <pc:sldMk cId="0" sldId="256"/>
         </pc:sldMkLst>
         <pc:spChg chg="mod">
-          <ac:chgData name="Christian Camilo Cano Vasquez" userId="8c73a2a4-758b-4e34-81ed-39462e48bd92" providerId="ADAL" clId="{83A706B2-AA95-4CDC-834C-F4D908C80230}" dt="2025-02-09T23:21:47.550" v="170" actId="20577"/>
+          <ac:chgData name="Elias San Martin Diehl" userId="S::esanmar2@upv.edu.es::c38c0557-adde-461d-a1bd-22239621d8b6" providerId="AD" clId="Web-{749E4FFB-E431-0F4D-ED87-FC6C47517DFE}" dt="2026-05-03T14:40:37.138" v="6" actId="20577"/>
           <ac:spMkLst>
             <pc:docMk/>
             <pc:sldMk cId="0" sldId="256"/>
-            <ac:spMk id="3" creationId="{00000000-0000-0000-0000-000000000000}"/>
-          </ac:spMkLst>
-        </pc:spChg>
-      </pc:sldChg>
-      <pc:sldChg chg="modSp mod">
-        <pc:chgData name="Christian Camilo Cano Vasquez" userId="8c73a2a4-758b-4e34-81ed-39462e48bd92" providerId="ADAL" clId="{83A706B2-AA95-4CDC-834C-F4D908C80230}" dt="2025-02-09T22:54:55.862" v="0" actId="20577"/>
-        <pc:sldMkLst>
-          <pc:docMk/>
-          <pc:sldMk cId="560234623" sldId="289"/>
-        </pc:sldMkLst>
-        <pc:spChg chg="mod">
-          <ac:chgData name="Christian Camilo Cano Vasquez" userId="8c73a2a4-758b-4e34-81ed-39462e48bd92" providerId="ADAL" clId="{83A706B2-AA95-4CDC-834C-F4D908C80230}" dt="2025-02-09T22:54:55.862" v="0" actId="20577"/>
-          <ac:spMkLst>
-            <pc:docMk/>
-            <pc:sldMk cId="560234623" sldId="289"/>
-            <ac:spMk id="4" creationId="{9F7BC140-B3D8-C3CB-55AD-9064C7CDE9CA}"/>
-          </ac:spMkLst>
-        </pc:spChg>
-      </pc:sldChg>
-      <pc:sldChg chg="addSp delSp modSp mod">
-        <pc:chgData name="Christian Camilo Cano Vasquez" userId="8c73a2a4-758b-4e34-81ed-39462e48bd92" providerId="ADAL" clId="{83A706B2-AA95-4CDC-834C-F4D908C80230}" dt="2025-02-09T23:24:42.493" v="173" actId="20577"/>
-        <pc:sldMkLst>
-          <pc:docMk/>
-          <pc:sldMk cId="730501311" sldId="290"/>
-        </pc:sldMkLst>
-        <pc:spChg chg="mod">
-          <ac:chgData name="Christian Camilo Cano Vasquez" userId="8c73a2a4-758b-4e34-81ed-39462e48bd92" providerId="ADAL" clId="{83A706B2-AA95-4CDC-834C-F4D908C80230}" dt="2025-02-09T23:04:13.626" v="39" actId="20577"/>
-          <ac:spMkLst>
-            <pc:docMk/>
-            <pc:sldMk cId="730501311" sldId="290"/>
-            <ac:spMk id="2" creationId="{D0F8CF3B-B920-DBFC-F825-0C87B51EADA7}"/>
-          </ac:spMkLst>
-        </pc:spChg>
-        <pc:spChg chg="del">
-          <ac:chgData name="Christian Camilo Cano Vasquez" userId="8c73a2a4-758b-4e34-81ed-39462e48bd92" providerId="ADAL" clId="{83A706B2-AA95-4CDC-834C-F4D908C80230}" dt="2025-02-09T22:59:02.631" v="2" actId="478"/>
-          <ac:spMkLst>
-            <pc:docMk/>
-            <pc:sldMk cId="730501311" sldId="290"/>
-            <ac:spMk id="4" creationId="{AA9E72FF-B948-6B7A-8909-97C6BE95D6FB}"/>
-          </ac:spMkLst>
-        </pc:spChg>
-        <pc:spChg chg="add mod">
-          <ac:chgData name="Christian Camilo Cano Vasquez" userId="8c73a2a4-758b-4e34-81ed-39462e48bd92" providerId="ADAL" clId="{83A706B2-AA95-4CDC-834C-F4D908C80230}" dt="2025-02-09T23:00:11.400" v="3"/>
-          <ac:spMkLst>
-            <pc:docMk/>
-            <pc:sldMk cId="730501311" sldId="290"/>
-            <ac:spMk id="5" creationId="{E7488849-10A1-FB48-F511-E57B062CD7E2}"/>
-          </ac:spMkLst>
-        </pc:spChg>
-        <pc:spChg chg="add mod">
-          <ac:chgData name="Christian Camilo Cano Vasquez" userId="8c73a2a4-758b-4e34-81ed-39462e48bd92" providerId="ADAL" clId="{83A706B2-AA95-4CDC-834C-F4D908C80230}" dt="2025-02-09T23:00:11.400" v="3"/>
-          <ac:spMkLst>
-            <pc:docMk/>
-            <pc:sldMk cId="730501311" sldId="290"/>
-            <ac:spMk id="6" creationId="{68726DAB-1B5F-39D1-63A0-BB708EA6E17F}"/>
-          </ac:spMkLst>
-        </pc:spChg>
-        <pc:spChg chg="add mod">
-          <ac:chgData name="Christian Camilo Cano Vasquez" userId="8c73a2a4-758b-4e34-81ed-39462e48bd92" providerId="ADAL" clId="{83A706B2-AA95-4CDC-834C-F4D908C80230}" dt="2025-02-09T23:00:11.400" v="3"/>
-          <ac:spMkLst>
-            <pc:docMk/>
-            <pc:sldMk cId="730501311" sldId="290"/>
-            <ac:spMk id="7" creationId="{6D309BFB-98FD-0CBA-3C6A-346D8859893B}"/>
-          </ac:spMkLst>
-        </pc:spChg>
-        <pc:spChg chg="add mod">
-          <ac:chgData name="Christian Camilo Cano Vasquez" userId="8c73a2a4-758b-4e34-81ed-39462e48bd92" providerId="ADAL" clId="{83A706B2-AA95-4CDC-834C-F4D908C80230}" dt="2025-02-09T23:02:26.970" v="32" actId="20577"/>
-          <ac:spMkLst>
-            <pc:docMk/>
-            <pc:sldMk cId="730501311" sldId="290"/>
-            <ac:spMk id="8" creationId="{E9BD6C85-02F1-7B54-41E3-E3D9883786D8}"/>
-          </ac:spMkLst>
-        </pc:spChg>
-        <pc:spChg chg="add mod">
-          <ac:chgData name="Christian Camilo Cano Vasquez" userId="8c73a2a4-758b-4e34-81ed-39462e48bd92" providerId="ADAL" clId="{83A706B2-AA95-4CDC-834C-F4D908C80230}" dt="2025-02-09T23:02:32.780" v="33"/>
-          <ac:spMkLst>
-            <pc:docMk/>
-            <pc:sldMk cId="730501311" sldId="290"/>
-            <ac:spMk id="9" creationId="{7431A41C-EEB3-44D0-4622-A915E258C8F0}"/>
-          </ac:spMkLst>
-        </pc:spChg>
-        <pc:spChg chg="mod">
-          <ac:chgData name="Christian Camilo Cano Vasquez" userId="8c73a2a4-758b-4e34-81ed-39462e48bd92" providerId="ADAL" clId="{83A706B2-AA95-4CDC-834C-F4D908C80230}" dt="2025-02-09T23:24:42.493" v="173" actId="20577"/>
-          <ac:spMkLst>
-            <pc:docMk/>
-            <pc:sldMk cId="730501311" sldId="290"/>
-            <ac:spMk id="16" creationId="{471E1424-6C4B-2D9A-1352-30AFB987AD41}"/>
-          </ac:spMkLst>
-        </pc:spChg>
-      </pc:sldChg>
-      <pc:sldChg chg="addSp delSp modSp mod">
-        <pc:chgData name="Christian Camilo Cano Vasquez" userId="8c73a2a4-758b-4e34-81ed-39462e48bd92" providerId="ADAL" clId="{83A706B2-AA95-4CDC-834C-F4D908C80230}" dt="2025-02-09T23:24:47.352" v="175" actId="20577"/>
-        <pc:sldMkLst>
-          <pc:docMk/>
-          <pc:sldMk cId="3712356003" sldId="291"/>
-        </pc:sldMkLst>
-        <pc:spChg chg="mod">
-          <ac:chgData name="Christian Camilo Cano Vasquez" userId="8c73a2a4-758b-4e34-81ed-39462e48bd92" providerId="ADAL" clId="{83A706B2-AA95-4CDC-834C-F4D908C80230}" dt="2025-02-09T23:15:16.003" v="106" actId="20577"/>
-          <ac:spMkLst>
-            <pc:docMk/>
-            <pc:sldMk cId="3712356003" sldId="291"/>
-            <ac:spMk id="2" creationId="{CA5F0FDF-2A95-453B-4ECA-AEB637FF2694}"/>
-          </ac:spMkLst>
-        </pc:spChg>
-        <pc:spChg chg="add mod">
-          <ac:chgData name="Christian Camilo Cano Vasquez" userId="8c73a2a4-758b-4e34-81ed-39462e48bd92" providerId="ADAL" clId="{83A706B2-AA95-4CDC-834C-F4D908C80230}" dt="2025-02-09T23:14:26.914" v="81" actId="1035"/>
-          <ac:spMkLst>
-            <pc:docMk/>
-            <pc:sldMk cId="3712356003" sldId="291"/>
-            <ac:spMk id="4" creationId="{FB4B77A0-B37C-3130-FB52-4E560C66946F}"/>
-          </ac:spMkLst>
-        </pc:spChg>
-        <pc:spChg chg="add mod">
-          <ac:chgData name="Christian Camilo Cano Vasquez" userId="8c73a2a4-758b-4e34-81ed-39462e48bd92" providerId="ADAL" clId="{83A706B2-AA95-4CDC-834C-F4D908C80230}" dt="2025-02-09T23:14:26.914" v="81" actId="1035"/>
-          <ac:spMkLst>
-            <pc:docMk/>
-            <pc:sldMk cId="3712356003" sldId="291"/>
-            <ac:spMk id="5" creationId="{DA7ECAA3-0876-C0FB-D7E5-448FCC5ED226}"/>
-          </ac:spMkLst>
-        </pc:spChg>
-        <pc:spChg chg="del">
-          <ac:chgData name="Christian Camilo Cano Vasquez" userId="8c73a2a4-758b-4e34-81ed-39462e48bd92" providerId="ADAL" clId="{83A706B2-AA95-4CDC-834C-F4D908C80230}" dt="2025-02-09T23:09:07.294" v="48" actId="478"/>
-          <ac:spMkLst>
-            <pc:docMk/>
-            <pc:sldMk cId="3712356003" sldId="291"/>
-            <ac:spMk id="7" creationId="{21F754A5-65BC-14A3-5F55-75716FFA9027}"/>
-          </ac:spMkLst>
-        </pc:spChg>
-        <pc:spChg chg="del">
-          <ac:chgData name="Christian Camilo Cano Vasquez" userId="8c73a2a4-758b-4e34-81ed-39462e48bd92" providerId="ADAL" clId="{83A706B2-AA95-4CDC-834C-F4D908C80230}" dt="2025-02-09T23:09:11.050" v="49" actId="478"/>
-          <ac:spMkLst>
-            <pc:docMk/>
-            <pc:sldMk cId="3712356003" sldId="291"/>
-            <ac:spMk id="8" creationId="{CD9C65D4-5494-F5CE-1094-CB0A32C33876}"/>
-          </ac:spMkLst>
-        </pc:spChg>
-        <pc:spChg chg="add mod">
-          <ac:chgData name="Christian Camilo Cano Vasquez" userId="8c73a2a4-758b-4e34-81ed-39462e48bd92" providerId="ADAL" clId="{83A706B2-AA95-4CDC-834C-F4D908C80230}" dt="2025-02-09T23:14:26.914" v="81" actId="1035"/>
-          <ac:spMkLst>
-            <pc:docMk/>
-            <pc:sldMk cId="3712356003" sldId="291"/>
-            <ac:spMk id="9" creationId="{C1467207-8D05-D4C6-EBD2-209F796AE977}"/>
-          </ac:spMkLst>
-        </pc:spChg>
-        <pc:spChg chg="add mod">
-          <ac:chgData name="Christian Camilo Cano Vasquez" userId="8c73a2a4-758b-4e34-81ed-39462e48bd92" providerId="ADAL" clId="{83A706B2-AA95-4CDC-834C-F4D908C80230}" dt="2025-02-09T23:14:26.914" v="81" actId="1035"/>
-          <ac:spMkLst>
-            <pc:docMk/>
-            <pc:sldMk cId="3712356003" sldId="291"/>
-            <ac:spMk id="10" creationId="{32E39C0C-95E1-ED90-891A-5D634D9DB76B}"/>
-          </ac:spMkLst>
-        </pc:spChg>
-        <pc:spChg chg="mod">
-          <ac:chgData name="Christian Camilo Cano Vasquez" userId="8c73a2a4-758b-4e34-81ed-39462e48bd92" providerId="ADAL" clId="{83A706B2-AA95-4CDC-834C-F4D908C80230}" dt="2025-02-09T23:24:47.352" v="175" actId="20577"/>
-          <ac:spMkLst>
-            <pc:docMk/>
-            <pc:sldMk cId="3712356003" sldId="291"/>
-            <ac:spMk id="16" creationId="{5431EA70-9578-8BF1-5A05-77CDC26788B4}"/>
-          </ac:spMkLst>
-        </pc:spChg>
-        <pc:picChg chg="del">
-          <ac:chgData name="Christian Camilo Cano Vasquez" userId="8c73a2a4-758b-4e34-81ed-39462e48bd92" providerId="ADAL" clId="{83A706B2-AA95-4CDC-834C-F4D908C80230}" dt="2025-02-09T23:08:10.270" v="47" actId="478"/>
-          <ac:picMkLst>
-            <pc:docMk/>
-            <pc:sldMk cId="3712356003" sldId="291"/>
-            <ac:picMk id="6" creationId="{380A8455-6386-C7D5-7BB6-B79D8D91F0EF}"/>
-          </ac:picMkLst>
-        </pc:picChg>
-      </pc:sldChg>
-      <pc:sldChg chg="addSp delSp modSp mod">
-        <pc:chgData name="Christian Camilo Cano Vasquez" userId="8c73a2a4-758b-4e34-81ed-39462e48bd92" providerId="ADAL" clId="{83A706B2-AA95-4CDC-834C-F4D908C80230}" dt="2025-02-09T23:31:23.910" v="296" actId="20577"/>
-        <pc:sldMkLst>
-          <pc:docMk/>
-          <pc:sldMk cId="2900117438" sldId="292"/>
-        </pc:sldMkLst>
-        <pc:spChg chg="mod">
-          <ac:chgData name="Christian Camilo Cano Vasquez" userId="8c73a2a4-758b-4e34-81ed-39462e48bd92" providerId="ADAL" clId="{83A706B2-AA95-4CDC-834C-F4D908C80230}" dt="2025-02-09T23:31:23.910" v="296" actId="20577"/>
-          <ac:spMkLst>
-            <pc:docMk/>
-            <pc:sldMk cId="2900117438" sldId="292"/>
-            <ac:spMk id="2" creationId="{82A62DD6-5488-72A1-9926-0CAEE59089A9}"/>
-          </ac:spMkLst>
-        </pc:spChg>
-        <pc:spChg chg="add mod">
-          <ac:chgData name="Christian Camilo Cano Vasquez" userId="8c73a2a4-758b-4e34-81ed-39462e48bd92" providerId="ADAL" clId="{83A706B2-AA95-4CDC-834C-F4D908C80230}" dt="2025-02-09T23:30:25.991" v="253"/>
-          <ac:spMkLst>
-            <pc:docMk/>
-            <pc:sldMk cId="2900117438" sldId="292"/>
-            <ac:spMk id="4" creationId="{796EDE51-D41E-C23B-F402-2F7357DE8714}"/>
-          </ac:spMkLst>
-        </pc:spChg>
-        <pc:spChg chg="add mod">
-          <ac:chgData name="Christian Camilo Cano Vasquez" userId="8c73a2a4-758b-4e34-81ed-39462e48bd92" providerId="ADAL" clId="{83A706B2-AA95-4CDC-834C-F4D908C80230}" dt="2025-02-09T23:30:25.991" v="253"/>
-          <ac:spMkLst>
-            <pc:docMk/>
-            <pc:sldMk cId="2900117438" sldId="292"/>
-            <ac:spMk id="5" creationId="{5A3233C9-FE6F-52D8-4D87-224222BDA8E1}"/>
-          </ac:spMkLst>
-        </pc:spChg>
-        <pc:spChg chg="add mod">
-          <ac:chgData name="Christian Camilo Cano Vasquez" userId="8c73a2a4-758b-4e34-81ed-39462e48bd92" providerId="ADAL" clId="{83A706B2-AA95-4CDC-834C-F4D908C80230}" dt="2025-02-09T23:30:25.991" v="253"/>
-          <ac:spMkLst>
-            <pc:docMk/>
-            <pc:sldMk cId="2900117438" sldId="292"/>
-            <ac:spMk id="6" creationId="{0C016548-01A2-6E58-B80D-148384B98EB3}"/>
-          </ac:spMkLst>
-        </pc:spChg>
-        <pc:spChg chg="del">
-          <ac:chgData name="Christian Camilo Cano Vasquez" userId="8c73a2a4-758b-4e34-81ed-39462e48bd92" providerId="ADAL" clId="{83A706B2-AA95-4CDC-834C-F4D908C80230}" dt="2025-02-09T23:30:21.832" v="251" actId="478"/>
-          <ac:spMkLst>
-            <pc:docMk/>
-            <pc:sldMk cId="2900117438" sldId="292"/>
-            <ac:spMk id="7" creationId="{FBC7D187-267A-ADD4-764C-D3820B8ED302}"/>
-          </ac:spMkLst>
-        </pc:spChg>
-        <pc:spChg chg="del">
-          <ac:chgData name="Christian Camilo Cano Vasquez" userId="8c73a2a4-758b-4e34-81ed-39462e48bd92" providerId="ADAL" clId="{83A706B2-AA95-4CDC-834C-F4D908C80230}" dt="2025-02-09T23:30:25.360" v="252" actId="478"/>
-          <ac:spMkLst>
-            <pc:docMk/>
-            <pc:sldMk cId="2900117438" sldId="292"/>
-            <ac:spMk id="8" creationId="{1EF5BFDA-8EC1-8C73-A932-F36C4DB93C73}"/>
-          </ac:spMkLst>
-        </pc:spChg>
-        <pc:spChg chg="add mod">
-          <ac:chgData name="Christian Camilo Cano Vasquez" userId="8c73a2a4-758b-4e34-81ed-39462e48bd92" providerId="ADAL" clId="{83A706B2-AA95-4CDC-834C-F4D908C80230}" dt="2025-02-09T23:30:25.991" v="253"/>
-          <ac:spMkLst>
-            <pc:docMk/>
-            <pc:sldMk cId="2900117438" sldId="292"/>
-            <ac:spMk id="9" creationId="{075D03BE-0D6A-89E5-3C68-D7BD97B4676E}"/>
-          </ac:spMkLst>
-        </pc:spChg>
-        <pc:spChg chg="add mod">
-          <ac:chgData name="Christian Camilo Cano Vasquez" userId="8c73a2a4-758b-4e34-81ed-39462e48bd92" providerId="ADAL" clId="{83A706B2-AA95-4CDC-834C-F4D908C80230}" dt="2025-02-09T23:30:25.991" v="253"/>
-          <ac:spMkLst>
-            <pc:docMk/>
-            <pc:sldMk cId="2900117438" sldId="292"/>
-            <ac:spMk id="10" creationId="{AC01EDEE-71CC-C570-700B-076F03FCF7E1}"/>
-          </ac:spMkLst>
-        </pc:spChg>
-        <pc:spChg chg="mod">
-          <ac:chgData name="Christian Camilo Cano Vasquez" userId="8c73a2a4-758b-4e34-81ed-39462e48bd92" providerId="ADAL" clId="{83A706B2-AA95-4CDC-834C-F4D908C80230}" dt="2025-02-09T23:29:51.940" v="250" actId="20577"/>
-          <ac:spMkLst>
-            <pc:docMk/>
-            <pc:sldMk cId="2900117438" sldId="292"/>
-            <ac:spMk id="16" creationId="{6AA2E789-F7AE-F068-274C-E0F13A22DBCA}"/>
-          </ac:spMkLst>
-        </pc:spChg>
-      </pc:sldChg>
-      <pc:sldChg chg="del">
-        <pc:chgData name="Christian Camilo Cano Vasquez" userId="8c73a2a4-758b-4e34-81ed-39462e48bd92" providerId="ADAL" clId="{83A706B2-AA95-4CDC-834C-F4D908C80230}" dt="2025-02-09T23:36:40.142" v="343" actId="47"/>
-        <pc:sldMkLst>
-          <pc:docMk/>
-          <pc:sldMk cId="3660438245" sldId="293"/>
-        </pc:sldMkLst>
-      </pc:sldChg>
-      <pc:sldChg chg="addSp delSp modSp mod">
-        <pc:chgData name="Christian Camilo Cano Vasquez" userId="8c73a2a4-758b-4e34-81ed-39462e48bd92" providerId="ADAL" clId="{83A706B2-AA95-4CDC-834C-F4D908C80230}" dt="2025-02-09T23:43:58.113" v="517" actId="20577"/>
-        <pc:sldMkLst>
-          <pc:docMk/>
-          <pc:sldMk cId="2815679427" sldId="294"/>
-        </pc:sldMkLst>
-        <pc:spChg chg="add del mod">
-          <ac:chgData name="Christian Camilo Cano Vasquez" userId="8c73a2a4-758b-4e34-81ed-39462e48bd92" providerId="ADAL" clId="{83A706B2-AA95-4CDC-834C-F4D908C80230}" dt="2025-02-09T23:39:50.840" v="385" actId="20577"/>
-          <ac:spMkLst>
-            <pc:docMk/>
-            <pc:sldMk cId="2815679427" sldId="294"/>
-            <ac:spMk id="2" creationId="{B5029729-ADF3-3B30-4FF9-83BE1DB82BD7}"/>
-          </ac:spMkLst>
-        </pc:spChg>
-        <pc:spChg chg="add mod">
-          <ac:chgData name="Christian Camilo Cano Vasquez" userId="8c73a2a4-758b-4e34-81ed-39462e48bd92" providerId="ADAL" clId="{83A706B2-AA95-4CDC-834C-F4D908C80230}" dt="2025-02-09T23:38:32.744" v="355" actId="1076"/>
-          <ac:spMkLst>
-            <pc:docMk/>
-            <pc:sldMk cId="2815679427" sldId="294"/>
-            <ac:spMk id="4" creationId="{06A90612-6654-786D-6F6A-F4EA67014379}"/>
-          </ac:spMkLst>
-        </pc:spChg>
-        <pc:spChg chg="add mod">
-          <ac:chgData name="Christian Camilo Cano Vasquez" userId="8c73a2a4-758b-4e34-81ed-39462e48bd92" providerId="ADAL" clId="{83A706B2-AA95-4CDC-834C-F4D908C80230}" dt="2025-02-09T23:38:32.744" v="355" actId="1076"/>
-          <ac:spMkLst>
-            <pc:docMk/>
-            <pc:sldMk cId="2815679427" sldId="294"/>
-            <ac:spMk id="5" creationId="{5032AC03-DEF1-DAF0-236E-A42778A7A062}"/>
-          </ac:spMkLst>
-        </pc:spChg>
-        <pc:spChg chg="add mod">
-          <ac:chgData name="Christian Camilo Cano Vasquez" userId="8c73a2a4-758b-4e34-81ed-39462e48bd92" providerId="ADAL" clId="{83A706B2-AA95-4CDC-834C-F4D908C80230}" dt="2025-02-09T23:37:46.370" v="351"/>
-          <ac:spMkLst>
-            <pc:docMk/>
-            <pc:sldMk cId="2815679427" sldId="294"/>
-            <ac:spMk id="6" creationId="{3338A34B-BF11-73AC-D891-565FD218C2F6}"/>
-          </ac:spMkLst>
-        </pc:spChg>
-        <pc:spChg chg="add del mod">
-          <ac:chgData name="Christian Camilo Cano Vasquez" userId="8c73a2a4-758b-4e34-81ed-39462e48bd92" providerId="ADAL" clId="{83A706B2-AA95-4CDC-834C-F4D908C80230}" dt="2025-02-09T23:39:04.073" v="372" actId="1036"/>
-          <ac:spMkLst>
-            <pc:docMk/>
-            <pc:sldMk cId="2815679427" sldId="294"/>
-            <ac:spMk id="7" creationId="{98DE5FDA-4E91-E843-E84A-1467BFAA9986}"/>
-          </ac:spMkLst>
-        </pc:spChg>
-        <pc:spChg chg="add del mod">
-          <ac:chgData name="Christian Camilo Cano Vasquez" userId="8c73a2a4-758b-4e34-81ed-39462e48bd92" providerId="ADAL" clId="{83A706B2-AA95-4CDC-834C-F4D908C80230}" dt="2025-02-09T23:43:58.113" v="517" actId="20577"/>
-          <ac:spMkLst>
-            <pc:docMk/>
-            <pc:sldMk cId="2815679427" sldId="294"/>
-            <ac:spMk id="8" creationId="{0DA14DBA-172E-DA2C-0573-6A00BF18F4A5}"/>
-          </ac:spMkLst>
-        </pc:spChg>
-        <pc:spChg chg="add mod">
-          <ac:chgData name="Christian Camilo Cano Vasquez" userId="8c73a2a4-758b-4e34-81ed-39462e48bd92" providerId="ADAL" clId="{83A706B2-AA95-4CDC-834C-F4D908C80230}" dt="2025-02-09T23:38:32.744" v="355" actId="1076"/>
-          <ac:spMkLst>
-            <pc:docMk/>
-            <pc:sldMk cId="2815679427" sldId="294"/>
-            <ac:spMk id="9" creationId="{4D1551B0-A822-E426-5721-B1FC37702FCB}"/>
-          </ac:spMkLst>
-        </pc:spChg>
-        <pc:spChg chg="add mod">
-          <ac:chgData name="Christian Camilo Cano Vasquez" userId="8c73a2a4-758b-4e34-81ed-39462e48bd92" providerId="ADAL" clId="{83A706B2-AA95-4CDC-834C-F4D908C80230}" dt="2025-02-09T23:38:32.744" v="355" actId="1076"/>
-          <ac:spMkLst>
-            <pc:docMk/>
-            <pc:sldMk cId="2815679427" sldId="294"/>
-            <ac:spMk id="11" creationId="{EFED69C0-44A5-9995-03AC-A48118DEE677}"/>
-          </ac:spMkLst>
-        </pc:spChg>
-        <pc:spChg chg="mod">
-          <ac:chgData name="Christian Camilo Cano Vasquez" userId="8c73a2a4-758b-4e34-81ed-39462e48bd92" providerId="ADAL" clId="{83A706B2-AA95-4CDC-834C-F4D908C80230}" dt="2025-02-09T23:38:57.830" v="367" actId="20577"/>
-          <ac:spMkLst>
-            <pc:docMk/>
-            <pc:sldMk cId="2815679427" sldId="294"/>
-            <ac:spMk id="16" creationId="{2B8D44BF-A3B5-6BED-C39C-FA8260E83536}"/>
-          </ac:spMkLst>
-        </pc:spChg>
-        <pc:picChg chg="add mod">
-          <ac:chgData name="Christian Camilo Cano Vasquez" userId="8c73a2a4-758b-4e34-81ed-39462e48bd92" providerId="ADAL" clId="{83A706B2-AA95-4CDC-834C-F4D908C80230}" dt="2025-02-09T23:38:32.744" v="355" actId="1076"/>
-          <ac:picMkLst>
-            <pc:docMk/>
-            <pc:sldMk cId="2815679427" sldId="294"/>
-            <ac:picMk id="10" creationId="{EA7B2FC2-D98A-62A1-228C-2882147646FE}"/>
-          </ac:picMkLst>
-        </pc:picChg>
-      </pc:sldChg>
-      <pc:sldChg chg="addSp delSp modSp new mod">
-        <pc:chgData name="Christian Camilo Cano Vasquez" userId="8c73a2a4-758b-4e34-81ed-39462e48bd92" providerId="ADAL" clId="{83A706B2-AA95-4CDC-834C-F4D908C80230}" dt="2025-02-09T23:17:54.551" v="115" actId="403"/>
-        <pc:sldMkLst>
-          <pc:docMk/>
-          <pc:sldMk cId="1640019522" sldId="295"/>
-        </pc:sldMkLst>
-        <pc:spChg chg="del">
-          <ac:chgData name="Christian Camilo Cano Vasquez" userId="8c73a2a4-758b-4e34-81ed-39462e48bd92" providerId="ADAL" clId="{83A706B2-AA95-4CDC-834C-F4D908C80230}" dt="2025-02-09T23:17:37.829" v="108" actId="478"/>
-          <ac:spMkLst>
-            <pc:docMk/>
-            <pc:sldMk cId="1640019522" sldId="295"/>
-            <ac:spMk id="2" creationId="{5D66A4B3-0EC3-435E-57A3-EB664561ABDB}"/>
-          </ac:spMkLst>
-        </pc:spChg>
-        <pc:spChg chg="del">
-          <ac:chgData name="Christian Camilo Cano Vasquez" userId="8c73a2a4-758b-4e34-81ed-39462e48bd92" providerId="ADAL" clId="{83A706B2-AA95-4CDC-834C-F4D908C80230}" dt="2025-02-09T23:17:45.590" v="109"/>
-          <ac:spMkLst>
-            <pc:docMk/>
-            <pc:sldMk cId="1640019522" sldId="295"/>
-            <ac:spMk id="3" creationId="{A7B12427-6892-E9F1-A7EF-25CEDC14529C}"/>
-          </ac:spMkLst>
-        </pc:spChg>
-        <pc:spChg chg="add mod">
-          <ac:chgData name="Christian Camilo Cano Vasquez" userId="8c73a2a4-758b-4e34-81ed-39462e48bd92" providerId="ADAL" clId="{83A706B2-AA95-4CDC-834C-F4D908C80230}" dt="2025-02-09T23:17:54.551" v="115" actId="403"/>
-          <ac:spMkLst>
-            <pc:docMk/>
-            <pc:sldMk cId="1640019522" sldId="295"/>
-            <ac:spMk id="6" creationId="{AF6692CA-D0D0-2BAF-E673-933E02AE2BB8}"/>
-          </ac:spMkLst>
-        </pc:spChg>
-      </pc:sldChg>
-      <pc:sldChg chg="modSp add mod">
-        <pc:chgData name="Christian Camilo Cano Vasquez" userId="8c73a2a4-758b-4e34-81ed-39462e48bd92" providerId="ADAL" clId="{83A706B2-AA95-4CDC-834C-F4D908C80230}" dt="2025-02-09T23:18:46.605" v="158" actId="20577"/>
-        <pc:sldMkLst>
-          <pc:docMk/>
-          <pc:sldMk cId="3873318961" sldId="296"/>
-        </pc:sldMkLst>
-        <pc:spChg chg="mod">
-          <ac:chgData name="Christian Camilo Cano Vasquez" userId="8c73a2a4-758b-4e34-81ed-39462e48bd92" providerId="ADAL" clId="{83A706B2-AA95-4CDC-834C-F4D908C80230}" dt="2025-02-09T23:18:46.605" v="158" actId="20577"/>
-          <ac:spMkLst>
-            <pc:docMk/>
-            <pc:sldMk cId="3873318961" sldId="296"/>
-            <ac:spMk id="6" creationId="{8111062F-F9A0-241E-6CCB-6E8BE4D8C60A}"/>
-          </ac:spMkLst>
-        </pc:spChg>
-      </pc:sldChg>
-      <pc:sldChg chg="modSp add mod">
-        <pc:chgData name="Christian Camilo Cano Vasquez" userId="8c73a2a4-758b-4e34-81ed-39462e48bd92" providerId="ADAL" clId="{83A706B2-AA95-4CDC-834C-F4D908C80230}" dt="2025-02-10T11:46:25.185" v="655" actId="20577"/>
-        <pc:sldMkLst>
-          <pc:docMk/>
-          <pc:sldMk cId="3454032079" sldId="297"/>
-        </pc:sldMkLst>
-        <pc:spChg chg="mod">
-          <ac:chgData name="Christian Camilo Cano Vasquez" userId="8c73a2a4-758b-4e34-81ed-39462e48bd92" providerId="ADAL" clId="{83A706B2-AA95-4CDC-834C-F4D908C80230}" dt="2025-02-09T23:26:45.534" v="237" actId="20577"/>
-          <ac:spMkLst>
-            <pc:docMk/>
-            <pc:sldMk cId="3454032079" sldId="297"/>
-            <ac:spMk id="2" creationId="{181326FD-308E-2C47-D5D2-57B3357241AA}"/>
-          </ac:spMkLst>
-        </pc:spChg>
-        <pc:spChg chg="mod">
-          <ac:chgData name="Christian Camilo Cano Vasquez" userId="8c73a2a4-758b-4e34-81ed-39462e48bd92" providerId="ADAL" clId="{83A706B2-AA95-4CDC-834C-F4D908C80230}" dt="2025-02-09T23:26:13.591" v="226" actId="20577"/>
-          <ac:spMkLst>
-            <pc:docMk/>
-            <pc:sldMk cId="3454032079" sldId="297"/>
-            <ac:spMk id="8" creationId="{B08C2240-8810-4E0A-7DCF-E62A8271EA2E}"/>
-          </ac:spMkLst>
-        </pc:spChg>
-        <pc:spChg chg="mod">
-          <ac:chgData name="Christian Camilo Cano Vasquez" userId="8c73a2a4-758b-4e34-81ed-39462e48bd92" providerId="ADAL" clId="{83A706B2-AA95-4CDC-834C-F4D908C80230}" dt="2025-02-09T23:26:17.294" v="229" actId="20577"/>
-          <ac:spMkLst>
-            <pc:docMk/>
-            <pc:sldMk cId="3454032079" sldId="297"/>
-            <ac:spMk id="9" creationId="{BBDDC809-0F06-CBE2-4D1A-3A2FA36C33A8}"/>
-          </ac:spMkLst>
-        </pc:spChg>
-        <pc:spChg chg="mod">
-          <ac:chgData name="Christian Camilo Cano Vasquez" userId="8c73a2a4-758b-4e34-81ed-39462e48bd92" providerId="ADAL" clId="{83A706B2-AA95-4CDC-834C-F4D908C80230}" dt="2025-02-10T11:46:25.185" v="655" actId="20577"/>
-          <ac:spMkLst>
-            <pc:docMk/>
-            <pc:sldMk cId="3454032079" sldId="297"/>
-            <ac:spMk id="16" creationId="{5AC39480-E3E5-69B1-401F-A50C45531EF2}"/>
-          </ac:spMkLst>
-        </pc:spChg>
-      </pc:sldChg>
-      <pc:sldChg chg="modSp add mod">
-        <pc:chgData name="Christian Camilo Cano Vasquez" userId="8c73a2a4-758b-4e34-81ed-39462e48bd92" providerId="ADAL" clId="{83A706B2-AA95-4CDC-834C-F4D908C80230}" dt="2025-02-09T23:36:30.584" v="342" actId="20577"/>
-        <pc:sldMkLst>
-          <pc:docMk/>
-          <pc:sldMk cId="2103719889" sldId="298"/>
-        </pc:sldMkLst>
-        <pc:spChg chg="mod">
-          <ac:chgData name="Christian Camilo Cano Vasquez" userId="8c73a2a4-758b-4e34-81ed-39462e48bd92" providerId="ADAL" clId="{83A706B2-AA95-4CDC-834C-F4D908C80230}" dt="2025-02-09T23:36:30.584" v="342" actId="20577"/>
-          <ac:spMkLst>
-            <pc:docMk/>
-            <pc:sldMk cId="2103719889" sldId="298"/>
-            <ac:spMk id="2" creationId="{8D88CB07-C5F5-9BB7-9F41-E171F0F0E2B9}"/>
-          </ac:spMkLst>
-        </pc:spChg>
-        <pc:spChg chg="mod">
-          <ac:chgData name="Christian Camilo Cano Vasquez" userId="8c73a2a4-758b-4e34-81ed-39462e48bd92" providerId="ADAL" clId="{83A706B2-AA95-4CDC-834C-F4D908C80230}" dt="2025-02-09T23:35:30.421" v="324" actId="20577"/>
-          <ac:spMkLst>
-            <pc:docMk/>
-            <pc:sldMk cId="2103719889" sldId="298"/>
-            <ac:spMk id="9" creationId="{2BDFECD2-156D-6697-CFBF-8CD783F9B986}"/>
-          </ac:spMkLst>
-        </pc:spChg>
-        <pc:spChg chg="mod">
-          <ac:chgData name="Christian Camilo Cano Vasquez" userId="8c73a2a4-758b-4e34-81ed-39462e48bd92" providerId="ADAL" clId="{83A706B2-AA95-4CDC-834C-F4D908C80230}" dt="2025-02-09T23:35:34.437" v="331" actId="20577"/>
-          <ac:spMkLst>
-            <pc:docMk/>
-            <pc:sldMk cId="2103719889" sldId="298"/>
-            <ac:spMk id="10" creationId="{3BFC64CA-DE35-A528-CF09-36A26DB3DEE4}"/>
-          </ac:spMkLst>
-        </pc:spChg>
-        <pc:spChg chg="mod">
-          <ac:chgData name="Christian Camilo Cano Vasquez" userId="8c73a2a4-758b-4e34-81ed-39462e48bd92" providerId="ADAL" clId="{83A706B2-AA95-4CDC-834C-F4D908C80230}" dt="2025-02-09T23:35:16.010" v="319" actId="20577"/>
-          <ac:spMkLst>
-            <pc:docMk/>
-            <pc:sldMk cId="2103719889" sldId="298"/>
-            <ac:spMk id="16" creationId="{53FFBD12-4EFF-41C1-4765-2AD268B2BD94}"/>
-          </ac:spMkLst>
-        </pc:spChg>
-      </pc:sldChg>
-      <pc:sldChg chg="modSp add mod">
-        <pc:chgData name="Christian Camilo Cano Vasquez" userId="8c73a2a4-758b-4e34-81ed-39462e48bd92" providerId="ADAL" clId="{83A706B2-AA95-4CDC-834C-F4D908C80230}" dt="2025-02-09T23:43:30.035" v="490" actId="20577"/>
-        <pc:sldMkLst>
-          <pc:docMk/>
-          <pc:sldMk cId="2685215753" sldId="299"/>
-        </pc:sldMkLst>
-        <pc:spChg chg="mod">
-          <ac:chgData name="Christian Camilo Cano Vasquez" userId="8c73a2a4-758b-4e34-81ed-39462e48bd92" providerId="ADAL" clId="{83A706B2-AA95-4CDC-834C-F4D908C80230}" dt="2025-02-09T23:43:30.035" v="490" actId="20577"/>
-          <ac:spMkLst>
-            <pc:docMk/>
-            <pc:sldMk cId="2685215753" sldId="299"/>
-            <ac:spMk id="2" creationId="{43D7D9E5-DAC3-2BB8-7377-826863CBAD4E}"/>
-          </ac:spMkLst>
-        </pc:spChg>
-        <pc:spChg chg="mod">
-          <ac:chgData name="Christian Camilo Cano Vasquez" userId="8c73a2a4-758b-4e34-81ed-39462e48bd92" providerId="ADAL" clId="{83A706B2-AA95-4CDC-834C-F4D908C80230}" dt="2025-02-09T23:43:03.787" v="468" actId="1076"/>
-          <ac:spMkLst>
-            <pc:docMk/>
-            <pc:sldMk cId="2685215753" sldId="299"/>
-            <ac:spMk id="8" creationId="{643565A9-7DB6-D6EE-152F-2852C8BA7986}"/>
-          </ac:spMkLst>
-        </pc:spChg>
-        <pc:spChg chg="mod">
-          <ac:chgData name="Christian Camilo Cano Vasquez" userId="8c73a2a4-758b-4e34-81ed-39462e48bd92" providerId="ADAL" clId="{83A706B2-AA95-4CDC-834C-F4D908C80230}" dt="2025-02-09T23:43:18.188" v="482" actId="20577"/>
-          <ac:spMkLst>
-            <pc:docMk/>
-            <pc:sldMk cId="2685215753" sldId="299"/>
-            <ac:spMk id="16" creationId="{C096193E-AB86-E3CD-BDAC-0F9156C1A3F0}"/>
-          </ac:spMkLst>
-        </pc:spChg>
-      </pc:sldChg>
-      <pc:sldChg chg="modSp add mod">
-        <pc:chgData name="Christian Camilo Cano Vasquez" userId="8c73a2a4-758b-4e34-81ed-39462e48bd92" providerId="ADAL" clId="{83A706B2-AA95-4CDC-834C-F4D908C80230}" dt="2025-02-09T23:48:20.230" v="543" actId="20577"/>
-        <pc:sldMkLst>
-          <pc:docMk/>
-          <pc:sldMk cId="1023731220" sldId="300"/>
-        </pc:sldMkLst>
-        <pc:spChg chg="mod">
-          <ac:chgData name="Christian Camilo Cano Vasquez" userId="8c73a2a4-758b-4e34-81ed-39462e48bd92" providerId="ADAL" clId="{83A706B2-AA95-4CDC-834C-F4D908C80230}" dt="2025-02-09T23:45:57.548" v="541" actId="20577"/>
-          <ac:spMkLst>
-            <pc:docMk/>
-            <pc:sldMk cId="1023731220" sldId="300"/>
-            <ac:spMk id="8" creationId="{B0CFB20A-64F3-A296-71E8-F4FA17D35314}"/>
-          </ac:spMkLst>
-        </pc:spChg>
-        <pc:spChg chg="mod">
-          <ac:chgData name="Christian Camilo Cano Vasquez" userId="8c73a2a4-758b-4e34-81ed-39462e48bd92" providerId="ADAL" clId="{83A706B2-AA95-4CDC-834C-F4D908C80230}" dt="2025-02-09T23:48:20.230" v="543" actId="20577"/>
-          <ac:spMkLst>
-            <pc:docMk/>
-            <pc:sldMk cId="1023731220" sldId="300"/>
-            <ac:spMk id="16" creationId="{E1662E38-DE72-ADF3-A38E-08ED40DCC2AD}"/>
-          </ac:spMkLst>
-        </pc:spChg>
-      </pc:sldChg>
-      <pc:sldChg chg="modSp add mod">
-        <pc:chgData name="Christian Camilo Cano Vasquez" userId="8c73a2a4-758b-4e34-81ed-39462e48bd92" providerId="ADAL" clId="{83A706B2-AA95-4CDC-834C-F4D908C80230}" dt="2025-02-10T08:28:14.084" v="652" actId="20577"/>
-        <pc:sldMkLst>
-          <pc:docMk/>
-          <pc:sldMk cId="699864314" sldId="301"/>
-        </pc:sldMkLst>
-        <pc:spChg chg="mod">
-          <ac:chgData name="Christian Camilo Cano Vasquez" userId="8c73a2a4-758b-4e34-81ed-39462e48bd92" providerId="ADAL" clId="{83A706B2-AA95-4CDC-834C-F4D908C80230}" dt="2025-02-09T23:49:32.025" v="650" actId="20577"/>
-          <ac:spMkLst>
-            <pc:docMk/>
-            <pc:sldMk cId="699864314" sldId="301"/>
-            <ac:spMk id="2" creationId="{42D73A2E-0E5A-8A39-6B70-F9E94D6DBB70}"/>
-          </ac:spMkLst>
-        </pc:spChg>
-        <pc:spChg chg="mod">
-          <ac:chgData name="Christian Camilo Cano Vasquez" userId="8c73a2a4-758b-4e34-81ed-39462e48bd92" providerId="ADAL" clId="{83A706B2-AA95-4CDC-834C-F4D908C80230}" dt="2025-02-10T08:28:14.084" v="652" actId="20577"/>
-          <ac:spMkLst>
-            <pc:docMk/>
-            <pc:sldMk cId="699864314" sldId="301"/>
-            <ac:spMk id="16" creationId="{1E256546-3103-104D-A87F-78AEBE5D595E}"/>
+            <ac:spMk id="4" creationId="{00000000-0000-0000-0000-000000000000}"/>
           </ac:spMkLst>
         </pc:spChg>
       </pc:sldChg>
@@ -4121,15 +3582,12 @@
           </a:prstGeom>
         </p:spPr>
         <p:txBody>
-          <a:bodyPr vert="horz" wrap="square" lIns="0" tIns="12700" rIns="0" bIns="0" rtlCol="0">
+          <a:bodyPr vert="horz" wrap="square" lIns="0" tIns="12700" rIns="0" bIns="0" rtlCol="0" anchor="t">
             <a:spAutoFit/>
           </a:bodyPr>
           <a:lstStyle/>
           <a:p>
             <a:pPr marL="12700">
-              <a:lnSpc>
-                <a:spcPct val="100000"/>
-              </a:lnSpc>
               <a:spcBef>
                 <a:spcPts val="100"/>
               </a:spcBef>
@@ -4147,6 +3605,20 @@
                 <a:cs typeface="Arial"/>
               </a:rPr>
               <a:t>: </a:t>
+            </a:r>
+            <a:r>
+              <a:rPr lang="es-ES" spc="165" dirty="0" err="1">
+                <a:latin typeface="Arial"/>
+                <a:cs typeface="Arial"/>
+              </a:rPr>
+              <a:t>Elias</a:t>
+            </a:r>
+            <a:r>
+              <a:rPr lang="es-ES" spc="165" dirty="0">
+                <a:latin typeface="Arial"/>
+                <a:cs typeface="Arial"/>
+              </a:rPr>
+              <a:t> San Martin Diehl</a:t>
             </a:r>
             <a:endParaRPr sz="1800" dirty="0">
               <a:latin typeface="Arial"/>
